--- a/MS Fabric/Deployment_Git_VScode_Python.pptx
+++ b/MS Fabric/Deployment_Git_VScode_Python.pptx
@@ -6,6 +6,7 @@
   </p:sldMasterIdLst>
   <p:sldIdLst>
     <p:sldId id="256" r:id="rId2"/>
+    <p:sldId id="257" r:id="rId3"/>
   </p:sldIdLst>
   <p:sldSz cx="12192000" cy="6858000"/>
   <p:notesSz cx="6858000" cy="9144000"/>
@@ -3875,6 +3876,569 @@
     <p:extLst>
       <p:ext uri="{BB962C8B-B14F-4D97-AF65-F5344CB8AC3E}">
         <p14:creationId xmlns:p14="http://schemas.microsoft.com/office/powerpoint/2010/main" val="233849342"/>
+      </p:ext>
+    </p:extLst>
+  </p:cSld>
+  <p:clrMapOvr>
+    <a:masterClrMapping/>
+  </p:clrMapOvr>
+</p:sld>
+</file>
+
+<file path=ppt/slides/slide2.xml><?xml version="1.0" encoding="utf-8"?>
+<p:sld xmlns:a="http://schemas.openxmlformats.org/drawingml/2006/main" xmlns:r="http://schemas.openxmlformats.org/officeDocument/2006/relationships" xmlns:p="http://schemas.openxmlformats.org/presentationml/2006/main">
+  <p:cSld>
+    <p:spTree>
+      <p:nvGrpSpPr>
+        <p:cNvPr id="1" name="">
+          <a:extLst>
+            <a:ext uri="{FF2B5EF4-FFF2-40B4-BE49-F238E27FC236}">
+              <a16:creationId xmlns:a16="http://schemas.microsoft.com/office/drawing/2014/main" id="{285E9E48-028F-4EEE-0A0B-58F9BBCDB969}"/>
+            </a:ext>
+          </a:extLst>
+        </p:cNvPr>
+        <p:cNvGrpSpPr/>
+        <p:nvPr/>
+      </p:nvGrpSpPr>
+      <p:grpSpPr>
+        <a:xfrm>
+          <a:off x="0" y="0"/>
+          <a:ext cx="0" cy="0"/>
+          <a:chOff x="0" y="0"/>
+          <a:chExt cx="0" cy="0"/>
+        </a:xfrm>
+      </p:grpSpPr>
+      <p:sp>
+        <p:nvSpPr>
+          <p:cNvPr id="2" name="Title 1">
+            <a:extLst>
+              <a:ext uri="{FF2B5EF4-FFF2-40B4-BE49-F238E27FC236}">
+                <a16:creationId xmlns:a16="http://schemas.microsoft.com/office/drawing/2014/main" id="{3C517F29-FE8E-8FB4-C521-8479FFBCC9EE}"/>
+              </a:ext>
+            </a:extLst>
+          </p:cNvPr>
+          <p:cNvSpPr>
+            <a:spLocks noGrp="1"/>
+          </p:cNvSpPr>
+          <p:nvPr>
+            <p:ph type="ctrTitle"/>
+          </p:nvPr>
+        </p:nvSpPr>
+        <p:spPr>
+          <a:xfrm>
+            <a:off x="1524000" y="169333"/>
+            <a:ext cx="9144000" cy="592667"/>
+          </a:xfrm>
+        </p:spPr>
+        <p:txBody>
+          <a:bodyPr>
+            <a:normAutofit/>
+          </a:bodyPr>
+          <a:lstStyle/>
+          <a:p>
+            <a:r>
+              <a:rPr lang="en-GB" sz="2400" b="1" i="1" dirty="0" err="1"/>
+              <a:t>Viariable</a:t>
+            </a:r>
+            <a:r>
+              <a:rPr lang="en-GB" sz="2400" b="1" i="1" dirty="0"/>
+              <a:t> library</a:t>
+            </a:r>
+            <a:endParaRPr lang="en-BE" sz="2400" b="1" i="1" dirty="0"/>
+          </a:p>
+        </p:txBody>
+      </p:sp>
+      <p:sp>
+        <p:nvSpPr>
+          <p:cNvPr id="3" name="TextBox 2">
+            <a:extLst>
+              <a:ext uri="{FF2B5EF4-FFF2-40B4-BE49-F238E27FC236}">
+                <a16:creationId xmlns:a16="http://schemas.microsoft.com/office/drawing/2014/main" id="{C8E819F2-8529-FD09-0FAF-ED1090E6C358}"/>
+              </a:ext>
+            </a:extLst>
+          </p:cNvPr>
+          <p:cNvSpPr txBox="1"/>
+          <p:nvPr/>
+        </p:nvSpPr>
+        <p:spPr>
+          <a:xfrm>
+            <a:off x="465667" y="1092200"/>
+            <a:ext cx="8686800" cy="4662815"/>
+          </a:xfrm>
+          <a:prstGeom prst="rect">
+            <a:avLst/>
+          </a:prstGeom>
+          <a:noFill/>
+        </p:spPr>
+        <p:txBody>
+          <a:bodyPr wrap="square" rtlCol="0">
+            <a:spAutoFit/>
+          </a:bodyPr>
+          <a:lstStyle/>
+          <a:p>
+            <a:r>
+              <a:rPr lang="en-GB" sz="1100" dirty="0"/>
+              <a:t>This is a resource in MS fabric that can  be used to collect variable that need to be used in </a:t>
+            </a:r>
+            <a:r>
+              <a:rPr lang="en-GB" sz="1100" dirty="0" err="1"/>
+              <a:t>defferent</a:t>
+            </a:r>
+            <a:r>
+              <a:rPr lang="en-GB" sz="1100" dirty="0"/>
+              <a:t> environments (Dev, test, Prod)</a:t>
+            </a:r>
+          </a:p>
+          <a:p>
+            <a:endParaRPr lang="en-GB" sz="1100" dirty="0"/>
+          </a:p>
+          <a:p>
+            <a:r>
+              <a:rPr lang="en-GB" sz="1100" dirty="0"/>
+              <a:t>Use case :</a:t>
+            </a:r>
+          </a:p>
+          <a:p>
+            <a:r>
+              <a:rPr lang="en-GB" sz="1100" dirty="0"/>
+              <a:t>In a dev </a:t>
+            </a:r>
+            <a:r>
+              <a:rPr lang="en-GB" sz="1100" dirty="0" err="1"/>
+              <a:t>workspsace</a:t>
+            </a:r>
+            <a:r>
+              <a:rPr lang="en-GB" sz="1100" dirty="0"/>
+              <a:t> create de needed resources like :</a:t>
+            </a:r>
+          </a:p>
+          <a:p>
+            <a:pPr marL="342900" indent="-342900">
+              <a:buFont typeface="+mj-lt"/>
+              <a:buAutoNum type="arabicPeriod"/>
+            </a:pPr>
+            <a:r>
+              <a:rPr lang="en-GB" sz="1100" dirty="0"/>
+              <a:t>Lakehouse   </a:t>
+            </a:r>
+            <a:r>
+              <a:rPr lang="en-GB" sz="1100" dirty="0">
+                <a:sym typeface="Wingdings" panose="05000000000000000000" pitchFamily="2" charset="2"/>
+              </a:rPr>
+              <a:t> </a:t>
+            </a:r>
+            <a:r>
+              <a:rPr lang="en-GB" sz="1100" i="1" dirty="0">
+                <a:sym typeface="Wingdings" panose="05000000000000000000" pitchFamily="2" charset="2"/>
+              </a:rPr>
+              <a:t>:   </a:t>
+            </a:r>
+            <a:r>
+              <a:rPr lang="en-GB" sz="1100" i="1" dirty="0" err="1">
+                <a:sym typeface="Wingdings" panose="05000000000000000000" pitchFamily="2" charset="2"/>
+              </a:rPr>
+              <a:t>workspaceID</a:t>
+            </a:r>
+            <a:r>
+              <a:rPr lang="en-GB" sz="1100" i="1" dirty="0">
+                <a:sym typeface="Wingdings" panose="05000000000000000000" pitchFamily="2" charset="2"/>
+              </a:rPr>
+              <a:t> , </a:t>
+            </a:r>
+            <a:r>
+              <a:rPr lang="en-GB" sz="1100" i="1" dirty="0" err="1">
+                <a:sym typeface="Wingdings" panose="05000000000000000000" pitchFamily="2" charset="2"/>
+              </a:rPr>
+              <a:t>lakehouseID</a:t>
+            </a:r>
+            <a:r>
+              <a:rPr lang="en-GB" sz="1100" i="1" dirty="0">
+                <a:sym typeface="Wingdings" panose="05000000000000000000" pitchFamily="2" charset="2"/>
+              </a:rPr>
+              <a:t> , </a:t>
+            </a:r>
+            <a:r>
+              <a:rPr lang="en-GB" sz="1100" i="1" dirty="0" err="1">
+                <a:sym typeface="Wingdings" panose="05000000000000000000" pitchFamily="2" charset="2"/>
+              </a:rPr>
+              <a:t>foder</a:t>
+            </a:r>
+            <a:r>
+              <a:rPr lang="en-GB" sz="1100" i="1" dirty="0">
+                <a:sym typeface="Wingdings" panose="05000000000000000000" pitchFamily="2" charset="2"/>
+              </a:rPr>
+              <a:t> and Fils </a:t>
+            </a:r>
+          </a:p>
+          <a:p>
+            <a:pPr marL="342900" indent="-342900">
+              <a:buFont typeface="+mj-lt"/>
+              <a:buAutoNum type="arabicPeriod"/>
+            </a:pPr>
+            <a:endParaRPr lang="en-GB" sz="1100" i="1" dirty="0">
+              <a:sym typeface="Wingdings" panose="05000000000000000000" pitchFamily="2" charset="2"/>
+            </a:endParaRPr>
+          </a:p>
+          <a:p>
+            <a:pPr marL="342900" indent="-342900">
+              <a:buFont typeface="+mj-lt"/>
+              <a:buAutoNum type="arabicPeriod"/>
+            </a:pPr>
+            <a:endParaRPr lang="en-GB" sz="1100" i="1" dirty="0">
+              <a:sym typeface="Wingdings" panose="05000000000000000000" pitchFamily="2" charset="2"/>
+            </a:endParaRPr>
+          </a:p>
+          <a:p>
+            <a:pPr marL="342900" indent="-342900">
+              <a:buFont typeface="+mj-lt"/>
+              <a:buAutoNum type="arabicPeriod"/>
+            </a:pPr>
+            <a:endParaRPr lang="en-GB" sz="1100" i="1" dirty="0">
+              <a:sym typeface="Wingdings" panose="05000000000000000000" pitchFamily="2" charset="2"/>
+            </a:endParaRPr>
+          </a:p>
+          <a:p>
+            <a:pPr marL="342900" indent="-342900">
+              <a:buFont typeface="+mj-lt"/>
+              <a:buAutoNum type="arabicPeriod"/>
+            </a:pPr>
+            <a:endParaRPr lang="en-GB" sz="1100" i="1" dirty="0">
+              <a:sym typeface="Wingdings" panose="05000000000000000000" pitchFamily="2" charset="2"/>
+            </a:endParaRPr>
+          </a:p>
+          <a:p>
+            <a:pPr marL="342900" indent="-342900">
+              <a:buFont typeface="+mj-lt"/>
+              <a:buAutoNum type="arabicPeriod"/>
+            </a:pPr>
+            <a:endParaRPr lang="en-GB" sz="1100" i="1" dirty="0">
+              <a:sym typeface="Wingdings" panose="05000000000000000000" pitchFamily="2" charset="2"/>
+            </a:endParaRPr>
+          </a:p>
+          <a:p>
+            <a:pPr marL="342900" indent="-342900">
+              <a:buFont typeface="+mj-lt"/>
+              <a:buAutoNum type="arabicPeriod"/>
+            </a:pPr>
+            <a:endParaRPr lang="en-GB" sz="1100" i="1" dirty="0"/>
+          </a:p>
+          <a:p>
+            <a:pPr marL="342900" indent="-342900">
+              <a:buFont typeface="+mj-lt"/>
+              <a:buAutoNum type="arabicPeriod"/>
+            </a:pPr>
+            <a:r>
+              <a:rPr lang="en-GB" sz="1100" dirty="0"/>
+              <a:t>Warehouse   </a:t>
+            </a:r>
+            <a:r>
+              <a:rPr lang="en-GB" sz="1100" dirty="0">
+                <a:sym typeface="Wingdings" panose="05000000000000000000" pitchFamily="2" charset="2"/>
+              </a:rPr>
+              <a:t> </a:t>
+            </a:r>
+            <a:r>
+              <a:rPr lang="en-GB" sz="1100" i="1" dirty="0">
+                <a:sym typeface="Wingdings" panose="05000000000000000000" pitchFamily="2" charset="2"/>
+              </a:rPr>
+              <a:t>:</a:t>
+            </a:r>
+          </a:p>
+          <a:p>
+            <a:pPr marL="342900" indent="-342900">
+              <a:buFont typeface="+mj-lt"/>
+              <a:buAutoNum type="arabicPeriod"/>
+            </a:pPr>
+            <a:endParaRPr lang="en-GB" sz="1100" i="1" dirty="0">
+              <a:sym typeface="Wingdings" panose="05000000000000000000" pitchFamily="2" charset="2"/>
+            </a:endParaRPr>
+          </a:p>
+          <a:p>
+            <a:pPr marL="342900" indent="-342900">
+              <a:buFont typeface="+mj-lt"/>
+              <a:buAutoNum type="arabicPeriod"/>
+            </a:pPr>
+            <a:endParaRPr lang="en-GB" sz="1100" dirty="0"/>
+          </a:p>
+          <a:p>
+            <a:endParaRPr lang="en-GB" sz="1100" dirty="0"/>
+          </a:p>
+          <a:p>
+            <a:pPr marL="342900" indent="-342900">
+              <a:buFont typeface="+mj-lt"/>
+              <a:buAutoNum type="arabicPeriod"/>
+            </a:pPr>
+            <a:endParaRPr lang="en-GB" sz="1100" dirty="0"/>
+          </a:p>
+          <a:p>
+            <a:pPr marL="342900" indent="-342900">
+              <a:buFont typeface="+mj-lt"/>
+              <a:buAutoNum type="arabicPeriod"/>
+            </a:pPr>
+            <a:r>
+              <a:rPr lang="en-GB" sz="1100" dirty="0"/>
+              <a:t>Azure Database : </a:t>
+            </a:r>
+          </a:p>
+          <a:p>
+            <a:pPr marL="342900" indent="-342900">
+              <a:buFont typeface="+mj-lt"/>
+              <a:buAutoNum type="arabicPeriod"/>
+            </a:pPr>
+            <a:endParaRPr lang="en-GB" sz="1100" dirty="0"/>
+          </a:p>
+          <a:p>
+            <a:pPr marL="342900" indent="-342900">
+              <a:buFont typeface="+mj-lt"/>
+              <a:buAutoNum type="arabicPeriod"/>
+            </a:pPr>
+            <a:endParaRPr lang="en-GB" sz="1100" dirty="0"/>
+          </a:p>
+          <a:p>
+            <a:pPr marL="342900" indent="-342900">
+              <a:buFont typeface="+mj-lt"/>
+              <a:buAutoNum type="arabicPeriod"/>
+            </a:pPr>
+            <a:endParaRPr lang="en-GB" sz="1100" dirty="0"/>
+          </a:p>
+          <a:p>
+            <a:pPr marL="342900" indent="-342900">
+              <a:buFont typeface="+mj-lt"/>
+              <a:buAutoNum type="arabicPeriod"/>
+            </a:pPr>
+            <a:endParaRPr lang="en-GB" sz="1100" dirty="0"/>
+          </a:p>
+          <a:p>
+            <a:pPr marL="342900" indent="-342900">
+              <a:buFont typeface="+mj-lt"/>
+              <a:buAutoNum type="arabicPeriod"/>
+            </a:pPr>
+            <a:r>
+              <a:rPr lang="en-GB" sz="1100" dirty="0" err="1"/>
+              <a:t>Databriks</a:t>
+            </a:r>
+            <a:r>
+              <a:rPr lang="en-GB" sz="1100" dirty="0"/>
+              <a:t> Unity </a:t>
+            </a:r>
+            <a:r>
+              <a:rPr lang="en-GB" sz="1100" dirty="0" err="1"/>
+              <a:t>Catalog</a:t>
+            </a:r>
+            <a:r>
+              <a:rPr lang="en-GB" sz="1100" dirty="0"/>
+              <a:t> </a:t>
+            </a:r>
+          </a:p>
+          <a:p>
+            <a:pPr marL="342900" indent="-342900">
+              <a:buFont typeface="+mj-lt"/>
+              <a:buAutoNum type="arabicPeriod"/>
+            </a:pPr>
+            <a:endParaRPr lang="en-GB" sz="1100" dirty="0"/>
+          </a:p>
+          <a:p>
+            <a:pPr marL="342900" indent="-342900">
+              <a:buFont typeface="+mj-lt"/>
+              <a:buAutoNum type="arabicPeriod"/>
+            </a:pPr>
+            <a:endParaRPr lang="en-GB" sz="1100" dirty="0"/>
+          </a:p>
+          <a:p>
+            <a:pPr marL="342900" indent="-342900">
+              <a:buFont typeface="+mj-lt"/>
+              <a:buAutoNum type="arabicPeriod"/>
+            </a:pPr>
+            <a:endParaRPr lang="en-GB" sz="1100" dirty="0"/>
+          </a:p>
+          <a:p>
+            <a:pPr marL="342900" indent="-342900">
+              <a:buFont typeface="+mj-lt"/>
+              <a:buAutoNum type="arabicPeriod"/>
+            </a:pPr>
+            <a:endParaRPr lang="en-GB" sz="1100" dirty="0"/>
+          </a:p>
+          <a:p>
+            <a:pPr marL="342900" indent="-342900">
+              <a:buFont typeface="+mj-lt"/>
+              <a:buAutoNum type="arabicPeriod"/>
+            </a:pPr>
+            <a:r>
+              <a:rPr lang="en-GB" sz="1100" dirty="0"/>
+              <a:t>ADLS  : example : </a:t>
+            </a:r>
+            <a:r>
+              <a:rPr lang="en-GB" sz="1000" i="1" dirty="0">
+                <a:hlinkClick r:id="rId2"/>
+              </a:rPr>
+              <a:t>https://ocoadlstoragefiles.blob.core.windows.net/</a:t>
+            </a:r>
+            <a:r>
+              <a:rPr lang="en-GB" sz="1000" i="1" dirty="0"/>
+              <a:t> + folder + </a:t>
+            </a:r>
+            <a:r>
+              <a:rPr lang="en-GB" sz="1000" i="1" dirty="0" err="1"/>
+              <a:t>fileName</a:t>
+            </a:r>
+            <a:endParaRPr lang="en-BE" sz="1100" i="1" dirty="0"/>
+          </a:p>
+        </p:txBody>
+      </p:sp>
+      <p:pic>
+        <p:nvPicPr>
+          <p:cNvPr id="7" name="Picture 6">
+            <a:extLst>
+              <a:ext uri="{FF2B5EF4-FFF2-40B4-BE49-F238E27FC236}">
+                <a16:creationId xmlns:a16="http://schemas.microsoft.com/office/drawing/2014/main" id="{E5859310-F3A1-F329-4269-F9ABDA1180C5}"/>
+              </a:ext>
+            </a:extLst>
+          </p:cNvPr>
+          <p:cNvPicPr>
+            <a:picLocks noChangeAspect="1"/>
+          </p:cNvPicPr>
+          <p:nvPr/>
+        </p:nvPicPr>
+        <p:blipFill>
+          <a:blip r:embed="rId3"/>
+          <a:stretch>
+            <a:fillRect/>
+          </a:stretch>
+        </p:blipFill>
+        <p:spPr>
+          <a:xfrm>
+            <a:off x="1916280" y="2760610"/>
+            <a:ext cx="3482642" cy="662997"/>
+          </a:xfrm>
+          <a:prstGeom prst="rect">
+            <a:avLst/>
+          </a:prstGeom>
+        </p:spPr>
+      </p:pic>
+      <p:pic>
+        <p:nvPicPr>
+          <p:cNvPr id="9" name="Picture 8">
+            <a:extLst>
+              <a:ext uri="{FF2B5EF4-FFF2-40B4-BE49-F238E27FC236}">
+                <a16:creationId xmlns:a16="http://schemas.microsoft.com/office/drawing/2014/main" id="{23DE9B2F-586E-98FE-D58C-4A4060924510}"/>
+              </a:ext>
+            </a:extLst>
+          </p:cNvPr>
+          <p:cNvPicPr>
+            <a:picLocks noChangeAspect="1"/>
+          </p:cNvPicPr>
+          <p:nvPr/>
+        </p:nvPicPr>
+        <p:blipFill>
+          <a:blip r:embed="rId4"/>
+          <a:stretch>
+            <a:fillRect/>
+          </a:stretch>
+        </p:blipFill>
+        <p:spPr>
+          <a:xfrm>
+            <a:off x="4546600" y="1677838"/>
+            <a:ext cx="2324301" cy="746825"/>
+          </a:xfrm>
+          <a:prstGeom prst="rect">
+            <a:avLst/>
+          </a:prstGeom>
+        </p:spPr>
+      </p:pic>
+      <p:pic>
+        <p:nvPicPr>
+          <p:cNvPr id="11" name="Picture 10">
+            <a:extLst>
+              <a:ext uri="{FF2B5EF4-FFF2-40B4-BE49-F238E27FC236}">
+                <a16:creationId xmlns:a16="http://schemas.microsoft.com/office/drawing/2014/main" id="{621DE676-AC1E-C299-0B5F-0397528DC70F}"/>
+              </a:ext>
+            </a:extLst>
+          </p:cNvPr>
+          <p:cNvPicPr>
+            <a:picLocks noChangeAspect="1"/>
+          </p:cNvPicPr>
+          <p:nvPr/>
+        </p:nvPicPr>
+        <p:blipFill>
+          <a:blip r:embed="rId5"/>
+          <a:stretch>
+            <a:fillRect/>
+          </a:stretch>
+        </p:blipFill>
+        <p:spPr>
+          <a:xfrm>
+            <a:off x="795172" y="5809662"/>
+            <a:ext cx="4013895" cy="738907"/>
+          </a:xfrm>
+          <a:prstGeom prst="rect">
+            <a:avLst/>
+          </a:prstGeom>
+        </p:spPr>
+      </p:pic>
+      <p:pic>
+        <p:nvPicPr>
+          <p:cNvPr id="13" name="Picture 12">
+            <a:extLst>
+              <a:ext uri="{FF2B5EF4-FFF2-40B4-BE49-F238E27FC236}">
+                <a16:creationId xmlns:a16="http://schemas.microsoft.com/office/drawing/2014/main" id="{EE77578B-C1BB-53A2-9D83-49885A28D680}"/>
+              </a:ext>
+            </a:extLst>
+          </p:cNvPr>
+          <p:cNvPicPr>
+            <a:picLocks noChangeAspect="1"/>
+          </p:cNvPicPr>
+          <p:nvPr/>
+        </p:nvPicPr>
+        <p:blipFill>
+          <a:blip r:embed="rId6"/>
+          <a:stretch>
+            <a:fillRect/>
+          </a:stretch>
+        </p:blipFill>
+        <p:spPr>
+          <a:xfrm>
+            <a:off x="2091049" y="3663621"/>
+            <a:ext cx="2514818" cy="624894"/>
+          </a:xfrm>
+          <a:prstGeom prst="rect">
+            <a:avLst/>
+          </a:prstGeom>
+        </p:spPr>
+      </p:pic>
+      <p:pic>
+        <p:nvPicPr>
+          <p:cNvPr id="15" name="Picture 14">
+            <a:extLst>
+              <a:ext uri="{FF2B5EF4-FFF2-40B4-BE49-F238E27FC236}">
+                <a16:creationId xmlns:a16="http://schemas.microsoft.com/office/drawing/2014/main" id="{14E12AF8-F802-357D-F947-E62309E813A9}"/>
+              </a:ext>
+            </a:extLst>
+          </p:cNvPr>
+          <p:cNvPicPr>
+            <a:picLocks noChangeAspect="1"/>
+          </p:cNvPicPr>
+          <p:nvPr/>
+        </p:nvPicPr>
+        <p:blipFill>
+          <a:blip r:embed="rId7"/>
+          <a:stretch>
+            <a:fillRect/>
+          </a:stretch>
+        </p:blipFill>
+        <p:spPr>
+          <a:xfrm>
+            <a:off x="3584782" y="2993039"/>
+            <a:ext cx="3208298" cy="198137"/>
+          </a:xfrm>
+          <a:prstGeom prst="rect">
+            <a:avLst/>
+          </a:prstGeom>
+        </p:spPr>
+      </p:pic>
+    </p:spTree>
+    <p:extLst>
+      <p:ext uri="{BB962C8B-B14F-4D97-AF65-F5344CB8AC3E}">
+        <p14:creationId xmlns:p14="http://schemas.microsoft.com/office/powerpoint/2010/main" val="3911836673"/>
       </p:ext>
     </p:extLst>
   </p:cSld>
